--- a/docs/pptx/carbo/ritu-carbo-linsubhr-ratio-anemia3.pptx
+++ b/docs/pptx/carbo/ritu-carbo-linsubhr-ratio-anemia3.pptx
@@ -2443,7 +2443,7 @@
           </p:nvSpPr>
           <p:spPr>
             <a:xfrm>
-              <a:off x="1427870" y="2073503"/>
+              <a:off x="1428538" y="2073503"/>
               <a:ext cx="0" cy="3649639"/>
             </a:xfrm>
             <a:custGeom>
@@ -2486,7 +2486,7 @@
           </p:nvSpPr>
           <p:spPr>
             <a:xfrm>
-              <a:off x="3243537" y="2073503"/>
+              <a:off x="3243764" y="2073503"/>
               <a:ext cx="0" cy="3649639"/>
             </a:xfrm>
             <a:custGeom>
@@ -2529,7 +2529,7 @@
           </p:nvSpPr>
           <p:spPr>
             <a:xfrm>
-              <a:off x="5059204" y="2073503"/>
+              <a:off x="5058989" y="2073503"/>
               <a:ext cx="0" cy="3649639"/>
             </a:xfrm>
             <a:custGeom>
@@ -2572,7 +2572,7 @@
           </p:nvSpPr>
           <p:spPr>
             <a:xfrm>
-              <a:off x="6874870" y="2073503"/>
+              <a:off x="6874214" y="2073503"/>
               <a:ext cx="0" cy="3649639"/>
             </a:xfrm>
             <a:custGeom>
@@ -2830,7 +2830,7 @@
           </p:nvSpPr>
           <p:spPr>
             <a:xfrm>
-              <a:off x="2335703" y="2073503"/>
+              <a:off x="2336151" y="2073503"/>
               <a:ext cx="0" cy="3649639"/>
             </a:xfrm>
             <a:custGeom>
@@ -2873,7 +2873,7 @@
           </p:nvSpPr>
           <p:spPr>
             <a:xfrm>
-              <a:off x="4151370" y="2073503"/>
+              <a:off x="4151376" y="2073503"/>
               <a:ext cx="0" cy="3649639"/>
             </a:xfrm>
             <a:custGeom>
@@ -2916,7 +2916,7 @@
           </p:nvSpPr>
           <p:spPr>
             <a:xfrm>
-              <a:off x="5967037" y="2073503"/>
+              <a:off x="5966601" y="2073503"/>
               <a:ext cx="0" cy="3649639"/>
             </a:xfrm>
             <a:custGeom>
@@ -2959,7 +2959,7 @@
           </p:nvSpPr>
           <p:spPr>
             <a:xfrm>
-              <a:off x="7782704" y="2073503"/>
+              <a:off x="7781826" y="2073503"/>
               <a:ext cx="0" cy="3649639"/>
             </a:xfrm>
             <a:custGeom>
@@ -3003,524 +3003,521 @@
           <p:spPr>
             <a:xfrm>
               <a:off x="1172049" y="2073503"/>
-              <a:ext cx="7090630" cy="3481667"/>
+              <a:ext cx="7090630" cy="3481702"/>
             </a:xfrm>
             <a:custGeom>
               <a:avLst/>
               <a:pathLst>
-                <a:path w="7090630" h="3481667">
+                <a:path w="7090630" h="3481702">
                   <a:moveTo>
-                    <a:pt x="2122703" y="0"/>
+                    <a:pt x="2155026" y="0"/>
                   </a:moveTo>
                   <a:lnTo>
-                    <a:pt x="2148675" y="137070"/>
-                  </a:lnTo>
-                  <a:lnTo>
-                    <a:pt x="2220298" y="476701"/>
-                  </a:lnTo>
-                  <a:lnTo>
-                    <a:pt x="2291920" y="781866"/>
-                  </a:lnTo>
-                  <a:lnTo>
-                    <a:pt x="2363543" y="1056061"/>
-                  </a:lnTo>
-                  <a:lnTo>
-                    <a:pt x="2435165" y="1302430"/>
-                  </a:lnTo>
-                  <a:lnTo>
-                    <a:pt x="2506788" y="1523797"/>
-                  </a:lnTo>
-                  <a:lnTo>
-                    <a:pt x="2578410" y="1722699"/>
-                  </a:lnTo>
-                  <a:lnTo>
-                    <a:pt x="2650033" y="1901416"/>
-                  </a:lnTo>
-                  <a:lnTo>
-                    <a:pt x="2721655" y="2061995"/>
-                  </a:lnTo>
-                  <a:lnTo>
-                    <a:pt x="2793278" y="2206279"/>
-                  </a:lnTo>
-                  <a:lnTo>
-                    <a:pt x="2864901" y="2335921"/>
-                  </a:lnTo>
-                  <a:lnTo>
-                    <a:pt x="2936523" y="2452406"/>
-                  </a:lnTo>
-                  <a:lnTo>
-                    <a:pt x="3008146" y="2557069"/>
-                  </a:lnTo>
-                  <a:lnTo>
-                    <a:pt x="3079768" y="2651111"/>
-                  </a:lnTo>
-                  <a:lnTo>
-                    <a:pt x="3151391" y="2656419"/>
-                  </a:lnTo>
-                  <a:lnTo>
-                    <a:pt x="3223013" y="2658629"/>
-                  </a:lnTo>
-                  <a:lnTo>
-                    <a:pt x="3294636" y="2660833"/>
-                  </a:lnTo>
-                  <a:lnTo>
-                    <a:pt x="3366258" y="2663031"/>
-                  </a:lnTo>
-                  <a:lnTo>
-                    <a:pt x="3437881" y="2665223"/>
-                  </a:lnTo>
-                  <a:lnTo>
-                    <a:pt x="3509503" y="2667409"/>
-                  </a:lnTo>
-                  <a:lnTo>
-                    <a:pt x="3581126" y="2669590"/>
-                  </a:lnTo>
-                  <a:lnTo>
-                    <a:pt x="3652748" y="2671764"/>
-                  </a:lnTo>
-                  <a:lnTo>
-                    <a:pt x="3724371" y="2673933"/>
-                  </a:lnTo>
-                  <a:lnTo>
-                    <a:pt x="3795993" y="2676096"/>
-                  </a:lnTo>
-                  <a:lnTo>
-                    <a:pt x="3867616" y="2678253"/>
-                  </a:lnTo>
-                  <a:lnTo>
-                    <a:pt x="3939238" y="2680404"/>
-                  </a:lnTo>
-                  <a:lnTo>
-                    <a:pt x="4010861" y="2682550"/>
-                  </a:lnTo>
-                  <a:lnTo>
-                    <a:pt x="4082483" y="2684690"/>
-                  </a:lnTo>
-                  <a:lnTo>
-                    <a:pt x="4154106" y="2686824"/>
-                  </a:lnTo>
-                  <a:lnTo>
-                    <a:pt x="4225729" y="2688953"/>
-                  </a:lnTo>
-                  <a:lnTo>
-                    <a:pt x="4297351" y="2691076"/>
-                  </a:lnTo>
-                  <a:lnTo>
-                    <a:pt x="4368974" y="2693193"/>
-                  </a:lnTo>
-                  <a:lnTo>
-                    <a:pt x="4440596" y="2695304"/>
-                  </a:lnTo>
-                  <a:lnTo>
-                    <a:pt x="4512219" y="2697410"/>
-                  </a:lnTo>
-                  <a:lnTo>
-                    <a:pt x="4583841" y="2699510"/>
-                  </a:lnTo>
-                  <a:lnTo>
-                    <a:pt x="4655464" y="2701605"/>
-                  </a:lnTo>
-                  <a:lnTo>
-                    <a:pt x="4727086" y="2703694"/>
-                  </a:lnTo>
-                  <a:lnTo>
-                    <a:pt x="4798709" y="2705778"/>
-                  </a:lnTo>
-                  <a:lnTo>
-                    <a:pt x="4870331" y="2707856"/>
-                  </a:lnTo>
-                  <a:lnTo>
-                    <a:pt x="4941954" y="2709928"/>
-                  </a:lnTo>
-                  <a:lnTo>
-                    <a:pt x="5013576" y="2711995"/>
-                  </a:lnTo>
-                  <a:lnTo>
-                    <a:pt x="5085199" y="2714056"/>
-                  </a:lnTo>
-                  <a:lnTo>
-                    <a:pt x="5156821" y="2716112"/>
-                  </a:lnTo>
-                  <a:lnTo>
-                    <a:pt x="5228444" y="2718162"/>
-                  </a:lnTo>
-                  <a:lnTo>
-                    <a:pt x="5300066" y="2720207"/>
-                  </a:lnTo>
-                  <a:lnTo>
-                    <a:pt x="5371689" y="2722246"/>
-                  </a:lnTo>
-                  <a:lnTo>
-                    <a:pt x="5443311" y="2724280"/>
-                  </a:lnTo>
-                  <a:lnTo>
-                    <a:pt x="5514934" y="2726309"/>
-                  </a:lnTo>
-                  <a:lnTo>
-                    <a:pt x="5586557" y="2728332"/>
-                  </a:lnTo>
-                  <a:lnTo>
-                    <a:pt x="5658179" y="2730349"/>
-                  </a:lnTo>
-                  <a:lnTo>
-                    <a:pt x="5729802" y="2732362"/>
-                  </a:lnTo>
-                  <a:lnTo>
-                    <a:pt x="5801424" y="2734369"/>
-                  </a:lnTo>
-                  <a:lnTo>
-                    <a:pt x="5873047" y="2736370"/>
-                  </a:lnTo>
-                  <a:lnTo>
-                    <a:pt x="5944669" y="2738366"/>
-                  </a:lnTo>
-                  <a:lnTo>
-                    <a:pt x="6016292" y="2740357"/>
-                  </a:lnTo>
-                  <a:lnTo>
-                    <a:pt x="6087914" y="2742343"/>
-                  </a:lnTo>
-                  <a:lnTo>
-                    <a:pt x="6159537" y="2744323"/>
-                  </a:lnTo>
-                  <a:lnTo>
-                    <a:pt x="6231159" y="2746298"/>
-                  </a:lnTo>
-                  <a:lnTo>
-                    <a:pt x="6302782" y="2748268"/>
-                  </a:lnTo>
-                  <a:lnTo>
-                    <a:pt x="6374404" y="2750232"/>
-                  </a:lnTo>
-                  <a:lnTo>
-                    <a:pt x="6446027" y="2752191"/>
-                  </a:lnTo>
-                  <a:lnTo>
-                    <a:pt x="6517649" y="2754145"/>
-                  </a:lnTo>
-                  <a:lnTo>
-                    <a:pt x="6589272" y="2756094"/>
-                  </a:lnTo>
-                  <a:lnTo>
-                    <a:pt x="6660894" y="2758037"/>
-                  </a:lnTo>
-                  <a:lnTo>
-                    <a:pt x="6732517" y="2759976"/>
-                  </a:lnTo>
-                  <a:lnTo>
-                    <a:pt x="6804139" y="2761909"/>
-                  </a:lnTo>
-                  <a:lnTo>
-                    <a:pt x="6875762" y="2763837"/>
-                  </a:lnTo>
-                  <a:lnTo>
-                    <a:pt x="6947385" y="2765760"/>
-                  </a:lnTo>
-                  <a:lnTo>
-                    <a:pt x="7019007" y="2767677"/>
-                  </a:lnTo>
-                  <a:lnTo>
-                    <a:pt x="7090630" y="2769590"/>
-                  </a:lnTo>
-                  <a:lnTo>
-                    <a:pt x="7090630" y="3481667"/>
-                  </a:lnTo>
-                  <a:lnTo>
-                    <a:pt x="7019007" y="3481432"/>
-                  </a:lnTo>
-                  <a:lnTo>
-                    <a:pt x="6947385" y="3481171"/>
-                  </a:lnTo>
-                  <a:lnTo>
-                    <a:pt x="6875762" y="3480880"/>
-                  </a:lnTo>
-                  <a:lnTo>
-                    <a:pt x="6804139" y="3480556"/>
-                  </a:lnTo>
-                  <a:lnTo>
-                    <a:pt x="6732517" y="3480196"/>
-                  </a:lnTo>
-                  <a:lnTo>
-                    <a:pt x="6660894" y="3479795"/>
-                  </a:lnTo>
-                  <a:lnTo>
-                    <a:pt x="6589272" y="3479349"/>
-                  </a:lnTo>
-                  <a:lnTo>
-                    <a:pt x="6517649" y="3478852"/>
-                  </a:lnTo>
-                  <a:lnTo>
-                    <a:pt x="6446027" y="3478299"/>
-                  </a:lnTo>
-                  <a:lnTo>
-                    <a:pt x="6374404" y="3477684"/>
-                  </a:lnTo>
-                  <a:lnTo>
-                    <a:pt x="6302782" y="3476999"/>
-                  </a:lnTo>
-                  <a:lnTo>
-                    <a:pt x="6231159" y="3476237"/>
-                  </a:lnTo>
-                  <a:lnTo>
-                    <a:pt x="6159537" y="3475389"/>
-                  </a:lnTo>
-                  <a:lnTo>
-                    <a:pt x="6087914" y="3474445"/>
-                  </a:lnTo>
-                  <a:lnTo>
-                    <a:pt x="6016292" y="3473394"/>
-                  </a:lnTo>
-                  <a:lnTo>
-                    <a:pt x="5944669" y="3472225"/>
-                  </a:lnTo>
-                  <a:lnTo>
-                    <a:pt x="5873047" y="3470924"/>
-                  </a:lnTo>
-                  <a:lnTo>
-                    <a:pt x="5801424" y="3469476"/>
-                  </a:lnTo>
-                  <a:lnTo>
-                    <a:pt x="5729802" y="3467864"/>
-                  </a:lnTo>
-                  <a:lnTo>
-                    <a:pt x="5658179" y="3466070"/>
-                  </a:lnTo>
-                  <a:lnTo>
-                    <a:pt x="5586557" y="3464073"/>
-                  </a:lnTo>
-                  <a:lnTo>
-                    <a:pt x="5514934" y="3461851"/>
-                  </a:lnTo>
-                  <a:lnTo>
-                    <a:pt x="5443311" y="3459378"/>
-                  </a:lnTo>
-                  <a:lnTo>
-                    <a:pt x="5371689" y="3456626"/>
-                  </a:lnTo>
-                  <a:lnTo>
-                    <a:pt x="5300066" y="3453563"/>
-                  </a:lnTo>
-                  <a:lnTo>
-                    <a:pt x="5228444" y="3450154"/>
-                  </a:lnTo>
-                  <a:lnTo>
-                    <a:pt x="5156821" y="3446360"/>
-                  </a:lnTo>
-                  <a:lnTo>
-                    <a:pt x="5085199" y="3442137"/>
-                  </a:lnTo>
-                  <a:lnTo>
-                    <a:pt x="5013576" y="3437438"/>
-                  </a:lnTo>
-                  <a:lnTo>
-                    <a:pt x="4941954" y="3432207"/>
-                  </a:lnTo>
-                  <a:lnTo>
-                    <a:pt x="4870331" y="3426386"/>
-                  </a:lnTo>
-                  <a:lnTo>
-                    <a:pt x="4798709" y="3419908"/>
-                  </a:lnTo>
-                  <a:lnTo>
-                    <a:pt x="4727086" y="3412697"/>
-                  </a:lnTo>
-                  <a:lnTo>
-                    <a:pt x="4655464" y="3404673"/>
-                  </a:lnTo>
-                  <a:lnTo>
-                    <a:pt x="4583841" y="3395742"/>
-                  </a:lnTo>
-                  <a:lnTo>
-                    <a:pt x="4512219" y="3385802"/>
-                  </a:lnTo>
-                  <a:lnTo>
-                    <a:pt x="4440596" y="3374740"/>
-                  </a:lnTo>
-                  <a:lnTo>
-                    <a:pt x="4368974" y="3362428"/>
-                  </a:lnTo>
-                  <a:lnTo>
-                    <a:pt x="4297351" y="3348726"/>
-                  </a:lnTo>
-                  <a:lnTo>
-                    <a:pt x="4225729" y="3333476"/>
-                  </a:lnTo>
-                  <a:lnTo>
-                    <a:pt x="4154106" y="3316503"/>
-                  </a:lnTo>
-                  <a:lnTo>
-                    <a:pt x="4082483" y="3297614"/>
-                  </a:lnTo>
-                  <a:lnTo>
-                    <a:pt x="4010861" y="3276591"/>
-                  </a:lnTo>
-                  <a:lnTo>
-                    <a:pt x="3939238" y="3253194"/>
-                  </a:lnTo>
-                  <a:lnTo>
-                    <a:pt x="3867616" y="3227154"/>
-                  </a:lnTo>
-                  <a:lnTo>
-                    <a:pt x="3795993" y="3198174"/>
-                  </a:lnTo>
-                  <a:lnTo>
-                    <a:pt x="3724371" y="3165919"/>
-                  </a:lnTo>
-                  <a:lnTo>
-                    <a:pt x="3652748" y="3130022"/>
-                  </a:lnTo>
-                  <a:lnTo>
-                    <a:pt x="3581126" y="3090071"/>
-                  </a:lnTo>
-                  <a:lnTo>
-                    <a:pt x="3509503" y="3045607"/>
-                  </a:lnTo>
-                  <a:lnTo>
-                    <a:pt x="3437881" y="2996122"/>
-                  </a:lnTo>
-                  <a:lnTo>
-                    <a:pt x="3366258" y="2941047"/>
-                  </a:lnTo>
-                  <a:lnTo>
-                    <a:pt x="3294636" y="2879751"/>
-                  </a:lnTo>
-                  <a:lnTo>
-                    <a:pt x="3223013" y="2811533"/>
-                  </a:lnTo>
-                  <a:lnTo>
-                    <a:pt x="3151391" y="2735610"/>
-                  </a:lnTo>
-                  <a:lnTo>
-                    <a:pt x="3079768" y="2654204"/>
-                  </a:lnTo>
-                  <a:lnTo>
-                    <a:pt x="3008146" y="2651982"/>
-                  </a:lnTo>
-                  <a:lnTo>
-                    <a:pt x="2936523" y="2649755"/>
-                  </a:lnTo>
-                  <a:lnTo>
-                    <a:pt x="2864901" y="2647521"/>
-                  </a:lnTo>
-                  <a:lnTo>
-                    <a:pt x="2793278" y="2645282"/>
-                  </a:lnTo>
-                  <a:lnTo>
-                    <a:pt x="2721655" y="2643036"/>
-                  </a:lnTo>
-                  <a:lnTo>
-                    <a:pt x="2650033" y="2640785"/>
-                  </a:lnTo>
-                  <a:lnTo>
-                    <a:pt x="2578410" y="2638527"/>
-                  </a:lnTo>
-                  <a:lnTo>
-                    <a:pt x="2506788" y="2636264"/>
-                  </a:lnTo>
-                  <a:lnTo>
-                    <a:pt x="2435165" y="2633994"/>
-                  </a:lnTo>
-                  <a:lnTo>
-                    <a:pt x="2363543" y="2631718"/>
-                  </a:lnTo>
-                  <a:lnTo>
-                    <a:pt x="2291920" y="2629436"/>
-                  </a:lnTo>
-                  <a:lnTo>
-                    <a:pt x="2220298" y="2627149"/>
-                  </a:lnTo>
-                  <a:lnTo>
-                    <a:pt x="2148675" y="2624854"/>
-                  </a:lnTo>
-                  <a:lnTo>
-                    <a:pt x="2077053" y="2622554"/>
-                  </a:lnTo>
-                  <a:lnTo>
-                    <a:pt x="2005430" y="2620248"/>
-                  </a:lnTo>
-                  <a:lnTo>
-                    <a:pt x="1933808" y="2617935"/>
-                  </a:lnTo>
-                  <a:lnTo>
-                    <a:pt x="1862185" y="2615617"/>
-                  </a:lnTo>
-                  <a:lnTo>
-                    <a:pt x="1790563" y="2613292"/>
-                  </a:lnTo>
-                  <a:lnTo>
-                    <a:pt x="1718940" y="2610961"/>
-                  </a:lnTo>
-                  <a:lnTo>
-                    <a:pt x="1647318" y="2608623"/>
-                  </a:lnTo>
-                  <a:lnTo>
-                    <a:pt x="1575695" y="2606280"/>
-                  </a:lnTo>
-                  <a:lnTo>
-                    <a:pt x="1504073" y="2603930"/>
-                  </a:lnTo>
-                  <a:lnTo>
-                    <a:pt x="1432450" y="2601573"/>
-                  </a:lnTo>
-                  <a:lnTo>
-                    <a:pt x="1360827" y="2599211"/>
-                  </a:lnTo>
-                  <a:lnTo>
-                    <a:pt x="1289205" y="2596842"/>
-                  </a:lnTo>
-                  <a:lnTo>
-                    <a:pt x="1217582" y="2594467"/>
-                  </a:lnTo>
-                  <a:lnTo>
-                    <a:pt x="1145960" y="2592085"/>
-                  </a:lnTo>
-                  <a:lnTo>
-                    <a:pt x="1074337" y="2589697"/>
-                  </a:lnTo>
-                  <a:lnTo>
-                    <a:pt x="1002715" y="2587303"/>
-                  </a:lnTo>
-                  <a:lnTo>
-                    <a:pt x="931092" y="2584902"/>
-                  </a:lnTo>
-                  <a:lnTo>
-                    <a:pt x="859470" y="2582495"/>
-                  </a:lnTo>
-                  <a:lnTo>
-                    <a:pt x="787847" y="2580081"/>
-                  </a:lnTo>
-                  <a:lnTo>
-                    <a:pt x="716225" y="2577661"/>
-                  </a:lnTo>
-                  <a:lnTo>
-                    <a:pt x="644602" y="2575235"/>
-                  </a:lnTo>
-                  <a:lnTo>
-                    <a:pt x="572980" y="2572802"/>
-                  </a:lnTo>
-                  <a:lnTo>
-                    <a:pt x="501357" y="2570362"/>
-                  </a:lnTo>
-                  <a:lnTo>
-                    <a:pt x="429735" y="2567916"/>
-                  </a:lnTo>
-                  <a:lnTo>
-                    <a:pt x="358112" y="2565463"/>
-                  </a:lnTo>
-                  <a:lnTo>
-                    <a:pt x="286490" y="2563004"/>
-                  </a:lnTo>
-                  <a:lnTo>
-                    <a:pt x="214867" y="2560538"/>
-                  </a:lnTo>
-                  <a:lnTo>
-                    <a:pt x="143245" y="2558066"/>
-                  </a:lnTo>
-                  <a:lnTo>
-                    <a:pt x="71622" y="2555587"/>
-                  </a:lnTo>
-                  <a:lnTo>
-                    <a:pt x="0" y="2553101"/>
+                    <a:pt x="2220298" y="327915"/>
+                  </a:lnTo>
+                  <a:lnTo>
+                    <a:pt x="2291920" y="650907"/>
+                  </a:lnTo>
+                  <a:lnTo>
+                    <a:pt x="2363543" y="940841"/>
+                  </a:lnTo>
+                  <a:lnTo>
+                    <a:pt x="2435165" y="1201102"/>
+                  </a:lnTo>
+                  <a:lnTo>
+                    <a:pt x="2506788" y="1434725"/>
+                  </a:lnTo>
+                  <a:lnTo>
+                    <a:pt x="2578410" y="1644437"/>
+                  </a:lnTo>
+                  <a:lnTo>
+                    <a:pt x="2650033" y="1832686"/>
+                  </a:lnTo>
+                  <a:lnTo>
+                    <a:pt x="2721655" y="2001668"/>
+                  </a:lnTo>
+                  <a:lnTo>
+                    <a:pt x="2793278" y="2153355"/>
+                  </a:lnTo>
+                  <a:lnTo>
+                    <a:pt x="2864901" y="2289518"/>
+                  </a:lnTo>
+                  <a:lnTo>
+                    <a:pt x="2936523" y="2411744"/>
+                  </a:lnTo>
+                  <a:lnTo>
+                    <a:pt x="3008146" y="2521461"/>
+                  </a:lnTo>
+                  <a:lnTo>
+                    <a:pt x="3079768" y="2619949"/>
+                  </a:lnTo>
+                  <a:lnTo>
+                    <a:pt x="3151391" y="2655006"/>
+                  </a:lnTo>
+                  <a:lnTo>
+                    <a:pt x="3223013" y="2656163"/>
+                  </a:lnTo>
+                  <a:lnTo>
+                    <a:pt x="3294636" y="2657318"/>
+                  </a:lnTo>
+                  <a:lnTo>
+                    <a:pt x="3366258" y="2658472"/>
+                  </a:lnTo>
+                  <a:lnTo>
+                    <a:pt x="3437881" y="2659624"/>
+                  </a:lnTo>
+                  <a:lnTo>
+                    <a:pt x="3509503" y="2660774"/>
+                  </a:lnTo>
+                  <a:lnTo>
+                    <a:pt x="3581126" y="2661923"/>
+                  </a:lnTo>
+                  <a:lnTo>
+                    <a:pt x="3652748" y="2663070"/>
+                  </a:lnTo>
+                  <a:lnTo>
+                    <a:pt x="3724371" y="2664216"/>
+                  </a:lnTo>
+                  <a:lnTo>
+                    <a:pt x="3795993" y="2665360"/>
+                  </a:lnTo>
+                  <a:lnTo>
+                    <a:pt x="3867616" y="2666502"/>
+                  </a:lnTo>
+                  <a:lnTo>
+                    <a:pt x="3939238" y="2667643"/>
+                  </a:lnTo>
+                  <a:lnTo>
+                    <a:pt x="4010861" y="2668782"/>
+                  </a:lnTo>
+                  <a:lnTo>
+                    <a:pt x="4082483" y="2669920"/>
+                  </a:lnTo>
+                  <a:lnTo>
+                    <a:pt x="4154106" y="2671056"/>
+                  </a:lnTo>
+                  <a:lnTo>
+                    <a:pt x="4225729" y="2672191"/>
+                  </a:lnTo>
+                  <a:lnTo>
+                    <a:pt x="4297351" y="2673323"/>
+                  </a:lnTo>
+                  <a:lnTo>
+                    <a:pt x="4368974" y="2674455"/>
+                  </a:lnTo>
+                  <a:lnTo>
+                    <a:pt x="4440596" y="2675584"/>
+                  </a:lnTo>
+                  <a:lnTo>
+                    <a:pt x="4512219" y="2676713"/>
+                  </a:lnTo>
+                  <a:lnTo>
+                    <a:pt x="4583841" y="2677839"/>
+                  </a:lnTo>
+                  <a:lnTo>
+                    <a:pt x="4655464" y="2678964"/>
+                  </a:lnTo>
+                  <a:lnTo>
+                    <a:pt x="4727086" y="2680088"/>
+                  </a:lnTo>
+                  <a:lnTo>
+                    <a:pt x="4798709" y="2681209"/>
+                  </a:lnTo>
+                  <a:lnTo>
+                    <a:pt x="4870331" y="2682330"/>
+                  </a:lnTo>
+                  <a:lnTo>
+                    <a:pt x="4941954" y="2683449"/>
+                  </a:lnTo>
+                  <a:lnTo>
+                    <a:pt x="5013576" y="2684566"/>
+                  </a:lnTo>
+                  <a:lnTo>
+                    <a:pt x="5085199" y="2685681"/>
+                  </a:lnTo>
+                  <a:lnTo>
+                    <a:pt x="5156821" y="2686795"/>
+                  </a:lnTo>
+                  <a:lnTo>
+                    <a:pt x="5228444" y="2687908"/>
+                  </a:lnTo>
+                  <a:lnTo>
+                    <a:pt x="5300066" y="2689019"/>
+                  </a:lnTo>
+                  <a:lnTo>
+                    <a:pt x="5371689" y="2690128"/>
+                  </a:lnTo>
+                  <a:lnTo>
+                    <a:pt x="5443311" y="2691236"/>
+                  </a:lnTo>
+                  <a:lnTo>
+                    <a:pt x="5514934" y="2692342"/>
+                  </a:lnTo>
+                  <a:lnTo>
+                    <a:pt x="5586557" y="2693447"/>
+                  </a:lnTo>
+                  <a:lnTo>
+                    <a:pt x="5658179" y="2694550"/>
+                  </a:lnTo>
+                  <a:lnTo>
+                    <a:pt x="5729802" y="2695652"/>
+                  </a:lnTo>
+                  <a:lnTo>
+                    <a:pt x="5801424" y="2696752"/>
+                  </a:lnTo>
+                  <a:lnTo>
+                    <a:pt x="5873047" y="2697851"/>
+                  </a:lnTo>
+                  <a:lnTo>
+                    <a:pt x="5944669" y="2698948"/>
+                  </a:lnTo>
+                  <a:lnTo>
+                    <a:pt x="6016292" y="2700043"/>
+                  </a:lnTo>
+                  <a:lnTo>
+                    <a:pt x="6087914" y="2701137"/>
+                  </a:lnTo>
+                  <a:lnTo>
+                    <a:pt x="6159537" y="2702230"/>
+                  </a:lnTo>
+                  <a:lnTo>
+                    <a:pt x="6231159" y="2703321"/>
+                  </a:lnTo>
+                  <a:lnTo>
+                    <a:pt x="6302782" y="2704410"/>
+                  </a:lnTo>
+                  <a:lnTo>
+                    <a:pt x="6374404" y="2705498"/>
+                  </a:lnTo>
+                  <a:lnTo>
+                    <a:pt x="6446027" y="2706584"/>
+                  </a:lnTo>
+                  <a:lnTo>
+                    <a:pt x="6517649" y="2707669"/>
+                  </a:lnTo>
+                  <a:lnTo>
+                    <a:pt x="6589272" y="2708753"/>
+                  </a:lnTo>
+                  <a:lnTo>
+                    <a:pt x="6660894" y="2709835"/>
+                  </a:lnTo>
+                  <a:lnTo>
+                    <a:pt x="6732517" y="2710915"/>
+                  </a:lnTo>
+                  <a:lnTo>
+                    <a:pt x="6804139" y="2711994"/>
+                  </a:lnTo>
+                  <a:lnTo>
+                    <a:pt x="6875762" y="2713071"/>
+                  </a:lnTo>
+                  <a:lnTo>
+                    <a:pt x="6947385" y="2714147"/>
+                  </a:lnTo>
+                  <a:lnTo>
+                    <a:pt x="7019007" y="2715221"/>
+                  </a:lnTo>
+                  <a:lnTo>
+                    <a:pt x="7090630" y="2716294"/>
+                  </a:lnTo>
+                  <a:lnTo>
+                    <a:pt x="7090630" y="3481702"/>
+                  </a:lnTo>
+                  <a:lnTo>
+                    <a:pt x="7019007" y="3481469"/>
+                  </a:lnTo>
+                  <a:lnTo>
+                    <a:pt x="6947385" y="3481210"/>
+                  </a:lnTo>
+                  <a:lnTo>
+                    <a:pt x="6875762" y="3480921"/>
+                  </a:lnTo>
+                  <a:lnTo>
+                    <a:pt x="6804139" y="3480598"/>
+                  </a:lnTo>
+                  <a:lnTo>
+                    <a:pt x="6732517" y="3480239"/>
+                  </a:lnTo>
+                  <a:lnTo>
+                    <a:pt x="6660894" y="3479840"/>
+                  </a:lnTo>
+                  <a:lnTo>
+                    <a:pt x="6589272" y="3479394"/>
+                  </a:lnTo>
+                  <a:lnTo>
+                    <a:pt x="6517649" y="3478898"/>
+                  </a:lnTo>
+                  <a:lnTo>
+                    <a:pt x="6446027" y="3478345"/>
+                  </a:lnTo>
+                  <a:lnTo>
+                    <a:pt x="6374404" y="3477729"/>
+                  </a:lnTo>
+                  <a:lnTo>
+                    <a:pt x="6302782" y="3477043"/>
+                  </a:lnTo>
+                  <a:lnTo>
+                    <a:pt x="6231159" y="3476279"/>
+                  </a:lnTo>
+                  <a:lnTo>
+                    <a:pt x="6159537" y="3475428"/>
+                  </a:lnTo>
+                  <a:lnTo>
+                    <a:pt x="6087914" y="3474479"/>
+                  </a:lnTo>
+                  <a:lnTo>
+                    <a:pt x="6016292" y="3473422"/>
+                  </a:lnTo>
+                  <a:lnTo>
+                    <a:pt x="5944669" y="3472245"/>
+                  </a:lnTo>
+                  <a:lnTo>
+                    <a:pt x="5873047" y="3470934"/>
+                  </a:lnTo>
+                  <a:lnTo>
+                    <a:pt x="5801424" y="3469473"/>
+                  </a:lnTo>
+                  <a:lnTo>
+                    <a:pt x="5729802" y="3467846"/>
+                  </a:lnTo>
+                  <a:lnTo>
+                    <a:pt x="5658179" y="3466033"/>
+                  </a:lnTo>
+                  <a:lnTo>
+                    <a:pt x="5586557" y="3464013"/>
+                  </a:lnTo>
+                  <a:lnTo>
+                    <a:pt x="5514934" y="3461763"/>
+                  </a:lnTo>
+                  <a:lnTo>
+                    <a:pt x="5443311" y="3459257"/>
+                  </a:lnTo>
+                  <a:lnTo>
+                    <a:pt x="5371689" y="3456465"/>
+                  </a:lnTo>
+                  <a:lnTo>
+                    <a:pt x="5300066" y="3453354"/>
+                  </a:lnTo>
+                  <a:lnTo>
+                    <a:pt x="5228444" y="3449889"/>
+                  </a:lnTo>
+                  <a:lnTo>
+                    <a:pt x="5156821" y="3446028"/>
+                  </a:lnTo>
+                  <a:lnTo>
+                    <a:pt x="5085199" y="3441728"/>
+                  </a:lnTo>
+                  <a:lnTo>
+                    <a:pt x="5013576" y="3436937"/>
+                  </a:lnTo>
+                  <a:lnTo>
+                    <a:pt x="4941954" y="3431600"/>
+                  </a:lnTo>
+                  <a:lnTo>
+                    <a:pt x="4870331" y="3425654"/>
+                  </a:lnTo>
+                  <a:lnTo>
+                    <a:pt x="4798709" y="3419031"/>
+                  </a:lnTo>
+                  <a:lnTo>
+                    <a:pt x="4727086" y="3411652"/>
+                  </a:lnTo>
+                  <a:lnTo>
+                    <a:pt x="4655464" y="3403432"/>
+                  </a:lnTo>
+                  <a:lnTo>
+                    <a:pt x="4583841" y="3394275"/>
+                  </a:lnTo>
+                  <a:lnTo>
+                    <a:pt x="4512219" y="3384074"/>
+                  </a:lnTo>
+                  <a:lnTo>
+                    <a:pt x="4440596" y="3372709"/>
+                  </a:lnTo>
+                  <a:lnTo>
+                    <a:pt x="4368974" y="3360049"/>
+                  </a:lnTo>
+                  <a:lnTo>
+                    <a:pt x="4297351" y="3345946"/>
+                  </a:lnTo>
+                  <a:lnTo>
+                    <a:pt x="4225729" y="3330234"/>
+                  </a:lnTo>
+                  <a:lnTo>
+                    <a:pt x="4154106" y="3312731"/>
+                  </a:lnTo>
+                  <a:lnTo>
+                    <a:pt x="4082483" y="3293232"/>
+                  </a:lnTo>
+                  <a:lnTo>
+                    <a:pt x="4010861" y="3271511"/>
+                  </a:lnTo>
+                  <a:lnTo>
+                    <a:pt x="3939238" y="3247312"/>
+                  </a:lnTo>
+                  <a:lnTo>
+                    <a:pt x="3867616" y="3220355"/>
+                  </a:lnTo>
+                  <a:lnTo>
+                    <a:pt x="3795993" y="3190324"/>
+                  </a:lnTo>
+                  <a:lnTo>
+                    <a:pt x="3724371" y="3156868"/>
+                  </a:lnTo>
+                  <a:lnTo>
+                    <a:pt x="3652748" y="3119599"/>
+                  </a:lnTo>
+                  <a:lnTo>
+                    <a:pt x="3581126" y="3078080"/>
+                  </a:lnTo>
+                  <a:lnTo>
+                    <a:pt x="3509503" y="3031827"/>
+                  </a:lnTo>
+                  <a:lnTo>
+                    <a:pt x="3437881" y="2980300"/>
+                  </a:lnTo>
+                  <a:lnTo>
+                    <a:pt x="3366258" y="2922899"/>
+                  </a:lnTo>
+                  <a:lnTo>
+                    <a:pt x="3294636" y="2858953"/>
+                  </a:lnTo>
+                  <a:lnTo>
+                    <a:pt x="3223013" y="2787716"/>
+                  </a:lnTo>
+                  <a:lnTo>
+                    <a:pt x="3151391" y="2708356"/>
+                  </a:lnTo>
+                  <a:lnTo>
+                    <a:pt x="3079768" y="2653847"/>
+                  </a:lnTo>
+                  <a:lnTo>
+                    <a:pt x="3008146" y="2652687"/>
+                  </a:lnTo>
+                  <a:lnTo>
+                    <a:pt x="2936523" y="2651526"/>
+                  </a:lnTo>
+                  <a:lnTo>
+                    <a:pt x="2864901" y="2650362"/>
+                  </a:lnTo>
+                  <a:lnTo>
+                    <a:pt x="2793278" y="2649197"/>
+                  </a:lnTo>
+                  <a:lnTo>
+                    <a:pt x="2721655" y="2648031"/>
+                  </a:lnTo>
+                  <a:lnTo>
+                    <a:pt x="2650033" y="2646862"/>
+                  </a:lnTo>
+                  <a:lnTo>
+                    <a:pt x="2578410" y="2645693"/>
+                  </a:lnTo>
+                  <a:lnTo>
+                    <a:pt x="2506788" y="2644521"/>
+                  </a:lnTo>
+                  <a:lnTo>
+                    <a:pt x="2435165" y="2643348"/>
+                  </a:lnTo>
+                  <a:lnTo>
+                    <a:pt x="2363543" y="2642173"/>
+                  </a:lnTo>
+                  <a:lnTo>
+                    <a:pt x="2291920" y="2640997"/>
+                  </a:lnTo>
+                  <a:lnTo>
+                    <a:pt x="2220298" y="2639819"/>
+                  </a:lnTo>
+                  <a:lnTo>
+                    <a:pt x="2148675" y="2638639"/>
+                  </a:lnTo>
+                  <a:lnTo>
+                    <a:pt x="2077053" y="2637458"/>
+                  </a:lnTo>
+                  <a:lnTo>
+                    <a:pt x="2005430" y="2636274"/>
+                  </a:lnTo>
+                  <a:lnTo>
+                    <a:pt x="1933808" y="2635090"/>
+                  </a:lnTo>
+                  <a:lnTo>
+                    <a:pt x="1862185" y="2633903"/>
+                  </a:lnTo>
+                  <a:lnTo>
+                    <a:pt x="1790563" y="2632715"/>
+                  </a:lnTo>
+                  <a:lnTo>
+                    <a:pt x="1718940" y="2631526"/>
+                  </a:lnTo>
+                  <a:lnTo>
+                    <a:pt x="1647318" y="2630335"/>
+                  </a:lnTo>
+                  <a:lnTo>
+                    <a:pt x="1575695" y="2629142"/>
+                  </a:lnTo>
+                  <a:lnTo>
+                    <a:pt x="1504073" y="2627947"/>
+                  </a:lnTo>
+                  <a:lnTo>
+                    <a:pt x="1432450" y="2626751"/>
+                  </a:lnTo>
+                  <a:lnTo>
+                    <a:pt x="1360827" y="2625553"/>
+                  </a:lnTo>
+                  <a:lnTo>
+                    <a:pt x="1289205" y="2624353"/>
+                  </a:lnTo>
+                  <a:lnTo>
+                    <a:pt x="1217582" y="2623152"/>
+                  </a:lnTo>
+                  <a:lnTo>
+                    <a:pt x="1145960" y="2621949"/>
+                  </a:lnTo>
+                  <a:lnTo>
+                    <a:pt x="1074337" y="2620744"/>
+                  </a:lnTo>
+                  <a:lnTo>
+                    <a:pt x="1002715" y="2619537"/>
+                  </a:lnTo>
+                  <a:lnTo>
+                    <a:pt x="931092" y="2618329"/>
+                  </a:lnTo>
+                  <a:lnTo>
+                    <a:pt x="859470" y="2617120"/>
+                  </a:lnTo>
+                  <a:lnTo>
+                    <a:pt x="787847" y="2615908"/>
+                  </a:lnTo>
+                  <a:lnTo>
+                    <a:pt x="716225" y="2614695"/>
+                  </a:lnTo>
+                  <a:lnTo>
+                    <a:pt x="644602" y="2613480"/>
+                  </a:lnTo>
+                  <a:lnTo>
+                    <a:pt x="572980" y="2612264"/>
+                  </a:lnTo>
+                  <a:lnTo>
+                    <a:pt x="501357" y="2611045"/>
+                  </a:lnTo>
+                  <a:lnTo>
+                    <a:pt x="429735" y="2609825"/>
+                  </a:lnTo>
+                  <a:lnTo>
+                    <a:pt x="358112" y="2608604"/>
+                  </a:lnTo>
+                  <a:lnTo>
+                    <a:pt x="286490" y="2607380"/>
+                  </a:lnTo>
+                  <a:lnTo>
+                    <a:pt x="214867" y="2606155"/>
+                  </a:lnTo>
+                  <a:lnTo>
+                    <a:pt x="143245" y="2604929"/>
+                  </a:lnTo>
+                  <a:lnTo>
+                    <a:pt x="71622" y="2603700"/>
+                  </a:lnTo>
+                  <a:lnTo>
+                    <a:pt x="0" y="2602470"/>
                   </a:lnTo>
                   <a:lnTo>
                     <a:pt x="0" y="0"/>
@@ -3549,225 +3546,222 @@
           </p:nvSpPr>
           <p:spPr>
             <a:xfrm>
-              <a:off x="3294752" y="2073503"/>
-              <a:ext cx="4967926" cy="2769590"/>
+              <a:off x="3327075" y="2073503"/>
+              <a:ext cx="4935604" cy="2716294"/>
             </a:xfrm>
             <a:custGeom>
               <a:avLst/>
               <a:pathLst>
-                <a:path w="4967926" h="2769590">
+                <a:path w="4935604" h="2716294">
                   <a:moveTo>
                     <a:pt x="0" y="0"/>
                   </a:moveTo>
                   <a:lnTo>
-                    <a:pt x="25972" y="137070"/>
-                  </a:lnTo>
-                  <a:lnTo>
-                    <a:pt x="97594" y="476701"/>
-                  </a:lnTo>
-                  <a:lnTo>
-                    <a:pt x="169217" y="781866"/>
-                  </a:lnTo>
-                  <a:lnTo>
-                    <a:pt x="240840" y="1056061"/>
-                  </a:lnTo>
-                  <a:lnTo>
-                    <a:pt x="312462" y="1302430"/>
-                  </a:lnTo>
-                  <a:lnTo>
-                    <a:pt x="384085" y="1523797"/>
-                  </a:lnTo>
-                  <a:lnTo>
-                    <a:pt x="455707" y="1722699"/>
-                  </a:lnTo>
-                  <a:lnTo>
-                    <a:pt x="527330" y="1901416"/>
-                  </a:lnTo>
-                  <a:lnTo>
-                    <a:pt x="598952" y="2061995"/>
-                  </a:lnTo>
-                  <a:lnTo>
-                    <a:pt x="670575" y="2206279"/>
-                  </a:lnTo>
-                  <a:lnTo>
-                    <a:pt x="742197" y="2335921"/>
-                  </a:lnTo>
-                  <a:lnTo>
-                    <a:pt x="813820" y="2452406"/>
-                  </a:lnTo>
-                  <a:lnTo>
-                    <a:pt x="885442" y="2557069"/>
-                  </a:lnTo>
-                  <a:lnTo>
-                    <a:pt x="957065" y="2651111"/>
-                  </a:lnTo>
-                  <a:lnTo>
-                    <a:pt x="1028687" y="2656419"/>
-                  </a:lnTo>
-                  <a:lnTo>
-                    <a:pt x="1100310" y="2658629"/>
-                  </a:lnTo>
-                  <a:lnTo>
-                    <a:pt x="1171932" y="2660833"/>
-                  </a:lnTo>
-                  <a:lnTo>
-                    <a:pt x="1243555" y="2663031"/>
-                  </a:lnTo>
-                  <a:lnTo>
-                    <a:pt x="1315177" y="2665223"/>
-                  </a:lnTo>
-                  <a:lnTo>
-                    <a:pt x="1386800" y="2667409"/>
-                  </a:lnTo>
-                  <a:lnTo>
-                    <a:pt x="1458422" y="2669590"/>
-                  </a:lnTo>
-                  <a:lnTo>
-                    <a:pt x="1530045" y="2671764"/>
-                  </a:lnTo>
-                  <a:lnTo>
-                    <a:pt x="1601668" y="2673933"/>
-                  </a:lnTo>
-                  <a:lnTo>
-                    <a:pt x="1673290" y="2676096"/>
-                  </a:lnTo>
-                  <a:lnTo>
-                    <a:pt x="1744913" y="2678253"/>
-                  </a:lnTo>
-                  <a:lnTo>
-                    <a:pt x="1816535" y="2680404"/>
-                  </a:lnTo>
-                  <a:lnTo>
-                    <a:pt x="1888158" y="2682550"/>
-                  </a:lnTo>
-                  <a:lnTo>
-                    <a:pt x="1959780" y="2684690"/>
-                  </a:lnTo>
-                  <a:lnTo>
-                    <a:pt x="2031403" y="2686824"/>
-                  </a:lnTo>
-                  <a:lnTo>
-                    <a:pt x="2103025" y="2688953"/>
-                  </a:lnTo>
-                  <a:lnTo>
-                    <a:pt x="2174648" y="2691076"/>
-                  </a:lnTo>
-                  <a:lnTo>
-                    <a:pt x="2246270" y="2693193"/>
-                  </a:lnTo>
-                  <a:lnTo>
-                    <a:pt x="2317893" y="2695304"/>
-                  </a:lnTo>
-                  <a:lnTo>
-                    <a:pt x="2389515" y="2697410"/>
-                  </a:lnTo>
-                  <a:lnTo>
-                    <a:pt x="2461138" y="2699510"/>
-                  </a:lnTo>
-                  <a:lnTo>
-                    <a:pt x="2532760" y="2701605"/>
-                  </a:lnTo>
-                  <a:lnTo>
-                    <a:pt x="2604383" y="2703694"/>
-                  </a:lnTo>
-                  <a:lnTo>
-                    <a:pt x="2676005" y="2705778"/>
-                  </a:lnTo>
-                  <a:lnTo>
-                    <a:pt x="2747628" y="2707856"/>
-                  </a:lnTo>
-                  <a:lnTo>
-                    <a:pt x="2819250" y="2709928"/>
-                  </a:lnTo>
-                  <a:lnTo>
-                    <a:pt x="2890873" y="2711995"/>
-                  </a:lnTo>
-                  <a:lnTo>
-                    <a:pt x="2962496" y="2714056"/>
-                  </a:lnTo>
-                  <a:lnTo>
-                    <a:pt x="3034118" y="2716112"/>
-                  </a:lnTo>
-                  <a:lnTo>
-                    <a:pt x="3105741" y="2718162"/>
-                  </a:lnTo>
-                  <a:lnTo>
-                    <a:pt x="3177363" y="2720207"/>
-                  </a:lnTo>
-                  <a:lnTo>
-                    <a:pt x="3248986" y="2722246"/>
-                  </a:lnTo>
-                  <a:lnTo>
-                    <a:pt x="3320608" y="2724280"/>
-                  </a:lnTo>
-                  <a:lnTo>
-                    <a:pt x="3392231" y="2726309"/>
-                  </a:lnTo>
-                  <a:lnTo>
-                    <a:pt x="3463853" y="2728332"/>
-                  </a:lnTo>
-                  <a:lnTo>
-                    <a:pt x="3535476" y="2730349"/>
-                  </a:lnTo>
-                  <a:lnTo>
-                    <a:pt x="3607098" y="2732362"/>
-                  </a:lnTo>
-                  <a:lnTo>
-                    <a:pt x="3678721" y="2734369"/>
-                  </a:lnTo>
-                  <a:lnTo>
-                    <a:pt x="3750343" y="2736370"/>
-                  </a:lnTo>
-                  <a:lnTo>
-                    <a:pt x="3821966" y="2738366"/>
-                  </a:lnTo>
-                  <a:lnTo>
-                    <a:pt x="3893588" y="2740357"/>
-                  </a:lnTo>
-                  <a:lnTo>
-                    <a:pt x="3965211" y="2742343"/>
-                  </a:lnTo>
-                  <a:lnTo>
-                    <a:pt x="4036833" y="2744323"/>
-                  </a:lnTo>
-                  <a:lnTo>
-                    <a:pt x="4108456" y="2746298"/>
-                  </a:lnTo>
-                  <a:lnTo>
-                    <a:pt x="4180078" y="2748268"/>
-                  </a:lnTo>
-                  <a:lnTo>
-                    <a:pt x="4251701" y="2750232"/>
-                  </a:lnTo>
-                  <a:lnTo>
-                    <a:pt x="4323324" y="2752191"/>
-                  </a:lnTo>
-                  <a:lnTo>
-                    <a:pt x="4394946" y="2754145"/>
-                  </a:lnTo>
-                  <a:lnTo>
-                    <a:pt x="4466569" y="2756094"/>
-                  </a:lnTo>
-                  <a:lnTo>
-                    <a:pt x="4538191" y="2758037"/>
-                  </a:lnTo>
-                  <a:lnTo>
-                    <a:pt x="4609814" y="2759976"/>
-                  </a:lnTo>
-                  <a:lnTo>
-                    <a:pt x="4681436" y="2761909"/>
-                  </a:lnTo>
-                  <a:lnTo>
-                    <a:pt x="4753059" y="2763837"/>
-                  </a:lnTo>
-                  <a:lnTo>
-                    <a:pt x="4824681" y="2765760"/>
-                  </a:lnTo>
-                  <a:lnTo>
-                    <a:pt x="4896304" y="2767677"/>
-                  </a:lnTo>
-                  <a:lnTo>
-                    <a:pt x="4967926" y="2769590"/>
+                    <a:pt x="65272" y="327915"/>
+                  </a:lnTo>
+                  <a:lnTo>
+                    <a:pt x="136894" y="650907"/>
+                  </a:lnTo>
+                  <a:lnTo>
+                    <a:pt x="208517" y="940841"/>
+                  </a:lnTo>
+                  <a:lnTo>
+                    <a:pt x="280139" y="1201102"/>
+                  </a:lnTo>
+                  <a:lnTo>
+                    <a:pt x="351762" y="1434725"/>
+                  </a:lnTo>
+                  <a:lnTo>
+                    <a:pt x="423384" y="1644437"/>
+                  </a:lnTo>
+                  <a:lnTo>
+                    <a:pt x="495007" y="1832686"/>
+                  </a:lnTo>
+                  <a:lnTo>
+                    <a:pt x="566629" y="2001668"/>
+                  </a:lnTo>
+                  <a:lnTo>
+                    <a:pt x="638252" y="2153355"/>
+                  </a:lnTo>
+                  <a:lnTo>
+                    <a:pt x="709875" y="2289518"/>
+                  </a:lnTo>
+                  <a:lnTo>
+                    <a:pt x="781497" y="2411744"/>
+                  </a:lnTo>
+                  <a:lnTo>
+                    <a:pt x="853120" y="2521461"/>
+                  </a:lnTo>
+                  <a:lnTo>
+                    <a:pt x="924742" y="2619949"/>
+                  </a:lnTo>
+                  <a:lnTo>
+                    <a:pt x="996365" y="2655006"/>
+                  </a:lnTo>
+                  <a:lnTo>
+                    <a:pt x="1067987" y="2656163"/>
+                  </a:lnTo>
+                  <a:lnTo>
+                    <a:pt x="1139610" y="2657318"/>
+                  </a:lnTo>
+                  <a:lnTo>
+                    <a:pt x="1211232" y="2658472"/>
+                  </a:lnTo>
+                  <a:lnTo>
+                    <a:pt x="1282855" y="2659624"/>
+                  </a:lnTo>
+                  <a:lnTo>
+                    <a:pt x="1354477" y="2660774"/>
+                  </a:lnTo>
+                  <a:lnTo>
+                    <a:pt x="1426100" y="2661923"/>
+                  </a:lnTo>
+                  <a:lnTo>
+                    <a:pt x="1497722" y="2663070"/>
+                  </a:lnTo>
+                  <a:lnTo>
+                    <a:pt x="1569345" y="2664216"/>
+                  </a:lnTo>
+                  <a:lnTo>
+                    <a:pt x="1640967" y="2665360"/>
+                  </a:lnTo>
+                  <a:lnTo>
+                    <a:pt x="1712590" y="2666502"/>
+                  </a:lnTo>
+                  <a:lnTo>
+                    <a:pt x="1784212" y="2667643"/>
+                  </a:lnTo>
+                  <a:lnTo>
+                    <a:pt x="1855835" y="2668782"/>
+                  </a:lnTo>
+                  <a:lnTo>
+                    <a:pt x="1927457" y="2669920"/>
+                  </a:lnTo>
+                  <a:lnTo>
+                    <a:pt x="1999080" y="2671056"/>
+                  </a:lnTo>
+                  <a:lnTo>
+                    <a:pt x="2070703" y="2672191"/>
+                  </a:lnTo>
+                  <a:lnTo>
+                    <a:pt x="2142325" y="2673323"/>
+                  </a:lnTo>
+                  <a:lnTo>
+                    <a:pt x="2213948" y="2674455"/>
+                  </a:lnTo>
+                  <a:lnTo>
+                    <a:pt x="2285570" y="2675584"/>
+                  </a:lnTo>
+                  <a:lnTo>
+                    <a:pt x="2357193" y="2676713"/>
+                  </a:lnTo>
+                  <a:lnTo>
+                    <a:pt x="2428815" y="2677839"/>
+                  </a:lnTo>
+                  <a:lnTo>
+                    <a:pt x="2500438" y="2678964"/>
+                  </a:lnTo>
+                  <a:lnTo>
+                    <a:pt x="2572060" y="2680088"/>
+                  </a:lnTo>
+                  <a:lnTo>
+                    <a:pt x="2643683" y="2681209"/>
+                  </a:lnTo>
+                  <a:lnTo>
+                    <a:pt x="2715305" y="2682330"/>
+                  </a:lnTo>
+                  <a:lnTo>
+                    <a:pt x="2786928" y="2683449"/>
+                  </a:lnTo>
+                  <a:lnTo>
+                    <a:pt x="2858550" y="2684566"/>
+                  </a:lnTo>
+                  <a:lnTo>
+                    <a:pt x="2930173" y="2685681"/>
+                  </a:lnTo>
+                  <a:lnTo>
+                    <a:pt x="3001795" y="2686795"/>
+                  </a:lnTo>
+                  <a:lnTo>
+                    <a:pt x="3073418" y="2687908"/>
+                  </a:lnTo>
+                  <a:lnTo>
+                    <a:pt x="3145040" y="2689019"/>
+                  </a:lnTo>
+                  <a:lnTo>
+                    <a:pt x="3216663" y="2690128"/>
+                  </a:lnTo>
+                  <a:lnTo>
+                    <a:pt x="3288285" y="2691236"/>
+                  </a:lnTo>
+                  <a:lnTo>
+                    <a:pt x="3359908" y="2692342"/>
+                  </a:lnTo>
+                  <a:lnTo>
+                    <a:pt x="3431530" y="2693447"/>
+                  </a:lnTo>
+                  <a:lnTo>
+                    <a:pt x="3503153" y="2694550"/>
+                  </a:lnTo>
+                  <a:lnTo>
+                    <a:pt x="3574776" y="2695652"/>
+                  </a:lnTo>
+                  <a:lnTo>
+                    <a:pt x="3646398" y="2696752"/>
+                  </a:lnTo>
+                  <a:lnTo>
+                    <a:pt x="3718021" y="2697851"/>
+                  </a:lnTo>
+                  <a:lnTo>
+                    <a:pt x="3789643" y="2698948"/>
+                  </a:lnTo>
+                  <a:lnTo>
+                    <a:pt x="3861266" y="2700043"/>
+                  </a:lnTo>
+                  <a:lnTo>
+                    <a:pt x="3932888" y="2701137"/>
+                  </a:lnTo>
+                  <a:lnTo>
+                    <a:pt x="4004511" y="2702230"/>
+                  </a:lnTo>
+                  <a:lnTo>
+                    <a:pt x="4076133" y="2703321"/>
+                  </a:lnTo>
+                  <a:lnTo>
+                    <a:pt x="4147756" y="2704410"/>
+                  </a:lnTo>
+                  <a:lnTo>
+                    <a:pt x="4219378" y="2705498"/>
+                  </a:lnTo>
+                  <a:lnTo>
+                    <a:pt x="4291001" y="2706584"/>
+                  </a:lnTo>
+                  <a:lnTo>
+                    <a:pt x="4362623" y="2707669"/>
+                  </a:lnTo>
+                  <a:lnTo>
+                    <a:pt x="4434246" y="2708753"/>
+                  </a:lnTo>
+                  <a:lnTo>
+                    <a:pt x="4505868" y="2709835"/>
+                  </a:lnTo>
+                  <a:lnTo>
+                    <a:pt x="4577491" y="2710915"/>
+                  </a:lnTo>
+                  <a:lnTo>
+                    <a:pt x="4649113" y="2711994"/>
+                  </a:lnTo>
+                  <a:lnTo>
+                    <a:pt x="4720736" y="2713071"/>
+                  </a:lnTo>
+                  <a:lnTo>
+                    <a:pt x="4792358" y="2714147"/>
+                  </a:lnTo>
+                  <a:lnTo>
+                    <a:pt x="4863981" y="2715221"/>
+                  </a:lnTo>
+                  <a:lnTo>
+                    <a:pt x="4935604" y="2716294"/>
                   </a:lnTo>
                 </a:path>
               </a:pathLst>
@@ -3787,309 +3781,309 @@
           </p:nvSpPr>
           <p:spPr>
             <a:xfrm>
-              <a:off x="1172049" y="4626604"/>
-              <a:ext cx="7090630" cy="928566"/>
+              <a:off x="1172049" y="4675973"/>
+              <a:ext cx="7090630" cy="879232"/>
             </a:xfrm>
             <a:custGeom>
               <a:avLst/>
               <a:pathLst>
-                <a:path w="7090630" h="928566">
+                <a:path w="7090630" h="879232">
                   <a:moveTo>
-                    <a:pt x="7090630" y="928566"/>
+                    <a:pt x="7090630" y="879232"/>
                   </a:moveTo>
                   <a:lnTo>
-                    <a:pt x="7019007" y="928331"/>
-                  </a:lnTo>
-                  <a:lnTo>
-                    <a:pt x="6947385" y="928069"/>
-                  </a:lnTo>
-                  <a:lnTo>
-                    <a:pt x="6875762" y="927778"/>
-                  </a:lnTo>
-                  <a:lnTo>
-                    <a:pt x="6804139" y="927455"/>
-                  </a:lnTo>
-                  <a:lnTo>
-                    <a:pt x="6732517" y="927094"/>
-                  </a:lnTo>
-                  <a:lnTo>
-                    <a:pt x="6660894" y="926693"/>
-                  </a:lnTo>
-                  <a:lnTo>
-                    <a:pt x="6589272" y="926247"/>
-                  </a:lnTo>
-                  <a:lnTo>
-                    <a:pt x="6517649" y="925750"/>
-                  </a:lnTo>
-                  <a:lnTo>
-                    <a:pt x="6446027" y="925197"/>
-                  </a:lnTo>
-                  <a:lnTo>
-                    <a:pt x="6374404" y="924582"/>
-                  </a:lnTo>
-                  <a:lnTo>
-                    <a:pt x="6302782" y="923897"/>
-                  </a:lnTo>
-                  <a:lnTo>
-                    <a:pt x="6231159" y="923135"/>
-                  </a:lnTo>
-                  <a:lnTo>
-                    <a:pt x="6159537" y="922287"/>
-                  </a:lnTo>
-                  <a:lnTo>
-                    <a:pt x="6087914" y="921343"/>
-                  </a:lnTo>
-                  <a:lnTo>
-                    <a:pt x="6016292" y="920293"/>
-                  </a:lnTo>
-                  <a:lnTo>
-                    <a:pt x="5944669" y="919124"/>
-                  </a:lnTo>
-                  <a:lnTo>
-                    <a:pt x="5873047" y="917822"/>
-                  </a:lnTo>
-                  <a:lnTo>
-                    <a:pt x="5801424" y="916374"/>
-                  </a:lnTo>
-                  <a:lnTo>
-                    <a:pt x="5729802" y="914762"/>
-                  </a:lnTo>
-                  <a:lnTo>
-                    <a:pt x="5658179" y="912968"/>
-                  </a:lnTo>
-                  <a:lnTo>
-                    <a:pt x="5586557" y="910972"/>
-                  </a:lnTo>
-                  <a:lnTo>
-                    <a:pt x="5514934" y="908750"/>
-                  </a:lnTo>
-                  <a:lnTo>
-                    <a:pt x="5443311" y="906277"/>
-                  </a:lnTo>
-                  <a:lnTo>
-                    <a:pt x="5371689" y="903525"/>
-                  </a:lnTo>
-                  <a:lnTo>
-                    <a:pt x="5300066" y="900462"/>
-                  </a:lnTo>
-                  <a:lnTo>
-                    <a:pt x="5228444" y="897052"/>
-                  </a:lnTo>
-                  <a:lnTo>
-                    <a:pt x="5156821" y="893258"/>
-                  </a:lnTo>
-                  <a:lnTo>
-                    <a:pt x="5085199" y="889036"/>
-                  </a:lnTo>
-                  <a:lnTo>
-                    <a:pt x="5013576" y="884336"/>
-                  </a:lnTo>
-                  <a:lnTo>
-                    <a:pt x="4941954" y="879106"/>
-                  </a:lnTo>
-                  <a:lnTo>
-                    <a:pt x="4870331" y="873285"/>
-                  </a:lnTo>
-                  <a:lnTo>
-                    <a:pt x="4798709" y="866806"/>
-                  </a:lnTo>
-                  <a:lnTo>
-                    <a:pt x="4727086" y="859596"/>
-                  </a:lnTo>
-                  <a:lnTo>
-                    <a:pt x="4655464" y="851571"/>
-                  </a:lnTo>
-                  <a:lnTo>
-                    <a:pt x="4583841" y="842640"/>
-                  </a:lnTo>
-                  <a:lnTo>
-                    <a:pt x="4512219" y="832701"/>
-                  </a:lnTo>
-                  <a:lnTo>
-                    <a:pt x="4440596" y="821638"/>
-                  </a:lnTo>
-                  <a:lnTo>
-                    <a:pt x="4368974" y="809326"/>
-                  </a:lnTo>
-                  <a:lnTo>
-                    <a:pt x="4297351" y="795624"/>
-                  </a:lnTo>
-                  <a:lnTo>
-                    <a:pt x="4225729" y="780374"/>
-                  </a:lnTo>
-                  <a:lnTo>
-                    <a:pt x="4154106" y="763402"/>
-                  </a:lnTo>
-                  <a:lnTo>
-                    <a:pt x="4082483" y="744513"/>
-                  </a:lnTo>
-                  <a:lnTo>
-                    <a:pt x="4010861" y="723490"/>
-                  </a:lnTo>
-                  <a:lnTo>
-                    <a:pt x="3939238" y="700093"/>
-                  </a:lnTo>
-                  <a:lnTo>
-                    <a:pt x="3867616" y="674053"/>
-                  </a:lnTo>
-                  <a:lnTo>
-                    <a:pt x="3795993" y="645072"/>
-                  </a:lnTo>
-                  <a:lnTo>
-                    <a:pt x="3724371" y="612818"/>
-                  </a:lnTo>
-                  <a:lnTo>
-                    <a:pt x="3652748" y="576921"/>
-                  </a:lnTo>
-                  <a:lnTo>
-                    <a:pt x="3581126" y="536969"/>
-                  </a:lnTo>
-                  <a:lnTo>
-                    <a:pt x="3509503" y="492506"/>
-                  </a:lnTo>
-                  <a:lnTo>
-                    <a:pt x="3437881" y="443020"/>
-                  </a:lnTo>
-                  <a:lnTo>
-                    <a:pt x="3366258" y="387945"/>
-                  </a:lnTo>
-                  <a:lnTo>
-                    <a:pt x="3294636" y="326650"/>
-                  </a:lnTo>
-                  <a:lnTo>
-                    <a:pt x="3223013" y="258432"/>
-                  </a:lnTo>
-                  <a:lnTo>
-                    <a:pt x="3151391" y="182508"/>
-                  </a:lnTo>
-                  <a:lnTo>
-                    <a:pt x="3079768" y="101102"/>
-                  </a:lnTo>
-                  <a:lnTo>
-                    <a:pt x="3008146" y="98881"/>
-                  </a:lnTo>
-                  <a:lnTo>
-                    <a:pt x="2936523" y="96653"/>
-                  </a:lnTo>
-                  <a:lnTo>
-                    <a:pt x="2864901" y="94420"/>
-                  </a:lnTo>
-                  <a:lnTo>
-                    <a:pt x="2793278" y="92180"/>
-                  </a:lnTo>
-                  <a:lnTo>
-                    <a:pt x="2721655" y="89935"/>
-                  </a:lnTo>
-                  <a:lnTo>
-                    <a:pt x="2650033" y="87683"/>
-                  </a:lnTo>
-                  <a:lnTo>
-                    <a:pt x="2578410" y="85426"/>
-                  </a:lnTo>
-                  <a:lnTo>
-                    <a:pt x="2506788" y="83162"/>
-                  </a:lnTo>
-                  <a:lnTo>
-                    <a:pt x="2435165" y="80892"/>
-                  </a:lnTo>
-                  <a:lnTo>
-                    <a:pt x="2363543" y="78617"/>
-                  </a:lnTo>
-                  <a:lnTo>
-                    <a:pt x="2291920" y="76335"/>
-                  </a:lnTo>
-                  <a:lnTo>
-                    <a:pt x="2220298" y="74047"/>
-                  </a:lnTo>
-                  <a:lnTo>
-                    <a:pt x="2148675" y="71753"/>
-                  </a:lnTo>
-                  <a:lnTo>
-                    <a:pt x="2077053" y="69453"/>
-                  </a:lnTo>
-                  <a:lnTo>
-                    <a:pt x="2005430" y="67146"/>
-                  </a:lnTo>
-                  <a:lnTo>
-                    <a:pt x="1933808" y="64834"/>
-                  </a:lnTo>
-                  <a:lnTo>
-                    <a:pt x="1862185" y="62515"/>
-                  </a:lnTo>
-                  <a:lnTo>
-                    <a:pt x="1790563" y="60190"/>
-                  </a:lnTo>
-                  <a:lnTo>
-                    <a:pt x="1718940" y="57859"/>
-                  </a:lnTo>
-                  <a:lnTo>
-                    <a:pt x="1647318" y="55522"/>
-                  </a:lnTo>
-                  <a:lnTo>
-                    <a:pt x="1575695" y="53178"/>
-                  </a:lnTo>
-                  <a:lnTo>
-                    <a:pt x="1504073" y="50828"/>
-                  </a:lnTo>
-                  <a:lnTo>
-                    <a:pt x="1432450" y="48472"/>
-                  </a:lnTo>
-                  <a:lnTo>
-                    <a:pt x="1360827" y="46109"/>
-                  </a:lnTo>
-                  <a:lnTo>
-                    <a:pt x="1289205" y="43740"/>
-                  </a:lnTo>
-                  <a:lnTo>
-                    <a:pt x="1217582" y="41365"/>
-                  </a:lnTo>
-                  <a:lnTo>
-                    <a:pt x="1145960" y="38984"/>
-                  </a:lnTo>
-                  <a:lnTo>
-                    <a:pt x="1074337" y="36596"/>
-                  </a:lnTo>
-                  <a:lnTo>
-                    <a:pt x="1002715" y="34201"/>
-                  </a:lnTo>
-                  <a:lnTo>
-                    <a:pt x="931092" y="31801"/>
-                  </a:lnTo>
-                  <a:lnTo>
-                    <a:pt x="859470" y="29393"/>
-                  </a:lnTo>
-                  <a:lnTo>
-                    <a:pt x="787847" y="26980"/>
-                  </a:lnTo>
-                  <a:lnTo>
-                    <a:pt x="716225" y="24560"/>
-                  </a:lnTo>
-                  <a:lnTo>
-                    <a:pt x="644602" y="22133"/>
-                  </a:lnTo>
-                  <a:lnTo>
-                    <a:pt x="572980" y="19700"/>
-                  </a:lnTo>
-                  <a:lnTo>
-                    <a:pt x="501357" y="17261"/>
-                  </a:lnTo>
-                  <a:lnTo>
-                    <a:pt x="429735" y="14814"/>
-                  </a:lnTo>
-                  <a:lnTo>
-                    <a:pt x="358112" y="12362"/>
-                  </a:lnTo>
-                  <a:lnTo>
-                    <a:pt x="286490" y="9903"/>
-                  </a:lnTo>
-                  <a:lnTo>
-                    <a:pt x="214867" y="7437"/>
-                  </a:lnTo>
-                  <a:lnTo>
-                    <a:pt x="143245" y="4964"/>
-                  </a:lnTo>
-                  <a:lnTo>
-                    <a:pt x="71622" y="2485"/>
+                    <a:pt x="7019007" y="878999"/>
+                  </a:lnTo>
+                  <a:lnTo>
+                    <a:pt x="6947385" y="878739"/>
+                  </a:lnTo>
+                  <a:lnTo>
+                    <a:pt x="6875762" y="878450"/>
+                  </a:lnTo>
+                  <a:lnTo>
+                    <a:pt x="6804139" y="878128"/>
+                  </a:lnTo>
+                  <a:lnTo>
+                    <a:pt x="6732517" y="877769"/>
+                  </a:lnTo>
+                  <a:lnTo>
+                    <a:pt x="6660894" y="877369"/>
+                  </a:lnTo>
+                  <a:lnTo>
+                    <a:pt x="6589272" y="876924"/>
+                  </a:lnTo>
+                  <a:lnTo>
+                    <a:pt x="6517649" y="876428"/>
+                  </a:lnTo>
+                  <a:lnTo>
+                    <a:pt x="6446027" y="875875"/>
+                  </a:lnTo>
+                  <a:lnTo>
+                    <a:pt x="6374404" y="875259"/>
+                  </a:lnTo>
+                  <a:lnTo>
+                    <a:pt x="6302782" y="874573"/>
+                  </a:lnTo>
+                  <a:lnTo>
+                    <a:pt x="6231159" y="873809"/>
+                  </a:lnTo>
+                  <a:lnTo>
+                    <a:pt x="6159537" y="872957"/>
+                  </a:lnTo>
+                  <a:lnTo>
+                    <a:pt x="6087914" y="872009"/>
+                  </a:lnTo>
+                  <a:lnTo>
+                    <a:pt x="6016292" y="870952"/>
+                  </a:lnTo>
+                  <a:lnTo>
+                    <a:pt x="5944669" y="869775"/>
+                  </a:lnTo>
+                  <a:lnTo>
+                    <a:pt x="5873047" y="868464"/>
+                  </a:lnTo>
+                  <a:lnTo>
+                    <a:pt x="5801424" y="867003"/>
+                  </a:lnTo>
+                  <a:lnTo>
+                    <a:pt x="5729802" y="865375"/>
+                  </a:lnTo>
+                  <a:lnTo>
+                    <a:pt x="5658179" y="863562"/>
+                  </a:lnTo>
+                  <a:lnTo>
+                    <a:pt x="5586557" y="861543"/>
+                  </a:lnTo>
+                  <a:lnTo>
+                    <a:pt x="5514934" y="859293"/>
+                  </a:lnTo>
+                  <a:lnTo>
+                    <a:pt x="5443311" y="856786"/>
+                  </a:lnTo>
+                  <a:lnTo>
+                    <a:pt x="5371689" y="853994"/>
+                  </a:lnTo>
+                  <a:lnTo>
+                    <a:pt x="5300066" y="850884"/>
+                  </a:lnTo>
+                  <a:lnTo>
+                    <a:pt x="5228444" y="847418"/>
+                  </a:lnTo>
+                  <a:lnTo>
+                    <a:pt x="5156821" y="843558"/>
+                  </a:lnTo>
+                  <a:lnTo>
+                    <a:pt x="5085199" y="839257"/>
+                  </a:lnTo>
+                  <a:lnTo>
+                    <a:pt x="5013576" y="834467"/>
+                  </a:lnTo>
+                  <a:lnTo>
+                    <a:pt x="4941954" y="829130"/>
+                  </a:lnTo>
+                  <a:lnTo>
+                    <a:pt x="4870331" y="823184"/>
+                  </a:lnTo>
+                  <a:lnTo>
+                    <a:pt x="4798709" y="816560"/>
+                  </a:lnTo>
+                  <a:lnTo>
+                    <a:pt x="4727086" y="809182"/>
+                  </a:lnTo>
+                  <a:lnTo>
+                    <a:pt x="4655464" y="800962"/>
+                  </a:lnTo>
+                  <a:lnTo>
+                    <a:pt x="4583841" y="791805"/>
+                  </a:lnTo>
+                  <a:lnTo>
+                    <a:pt x="4512219" y="781603"/>
+                  </a:lnTo>
+                  <a:lnTo>
+                    <a:pt x="4440596" y="770239"/>
+                  </a:lnTo>
+                  <a:lnTo>
+                    <a:pt x="4368974" y="757579"/>
+                  </a:lnTo>
+                  <a:lnTo>
+                    <a:pt x="4297351" y="743475"/>
+                  </a:lnTo>
+                  <a:lnTo>
+                    <a:pt x="4225729" y="727764"/>
+                  </a:lnTo>
+                  <a:lnTo>
+                    <a:pt x="4154106" y="710261"/>
+                  </a:lnTo>
+                  <a:lnTo>
+                    <a:pt x="4082483" y="690762"/>
+                  </a:lnTo>
+                  <a:lnTo>
+                    <a:pt x="4010861" y="669040"/>
+                  </a:lnTo>
+                  <a:lnTo>
+                    <a:pt x="3939238" y="644842"/>
+                  </a:lnTo>
+                  <a:lnTo>
+                    <a:pt x="3867616" y="617884"/>
+                  </a:lnTo>
+                  <a:lnTo>
+                    <a:pt x="3795993" y="587853"/>
+                  </a:lnTo>
+                  <a:lnTo>
+                    <a:pt x="3724371" y="554398"/>
+                  </a:lnTo>
+                  <a:lnTo>
+                    <a:pt x="3652748" y="517128"/>
+                  </a:lnTo>
+                  <a:lnTo>
+                    <a:pt x="3581126" y="475609"/>
+                  </a:lnTo>
+                  <a:lnTo>
+                    <a:pt x="3509503" y="429356"/>
+                  </a:lnTo>
+                  <a:lnTo>
+                    <a:pt x="3437881" y="377830"/>
+                  </a:lnTo>
+                  <a:lnTo>
+                    <a:pt x="3366258" y="320428"/>
+                  </a:lnTo>
+                  <a:lnTo>
+                    <a:pt x="3294636" y="256482"/>
+                  </a:lnTo>
+                  <a:lnTo>
+                    <a:pt x="3223013" y="185245"/>
+                  </a:lnTo>
+                  <a:lnTo>
+                    <a:pt x="3151391" y="105886"/>
+                  </a:lnTo>
+                  <a:lnTo>
+                    <a:pt x="3079768" y="51377"/>
+                  </a:lnTo>
+                  <a:lnTo>
+                    <a:pt x="3008146" y="50217"/>
+                  </a:lnTo>
+                  <a:lnTo>
+                    <a:pt x="2936523" y="49055"/>
+                  </a:lnTo>
+                  <a:lnTo>
+                    <a:pt x="2864901" y="47892"/>
+                  </a:lnTo>
+                  <a:lnTo>
+                    <a:pt x="2793278" y="46727"/>
+                  </a:lnTo>
+                  <a:lnTo>
+                    <a:pt x="2721655" y="45560"/>
+                  </a:lnTo>
+                  <a:lnTo>
+                    <a:pt x="2650033" y="44392"/>
+                  </a:lnTo>
+                  <a:lnTo>
+                    <a:pt x="2578410" y="43222"/>
+                  </a:lnTo>
+                  <a:lnTo>
+                    <a:pt x="2506788" y="42051"/>
+                  </a:lnTo>
+                  <a:lnTo>
+                    <a:pt x="2435165" y="40878"/>
+                  </a:lnTo>
+                  <a:lnTo>
+                    <a:pt x="2363543" y="39703"/>
+                  </a:lnTo>
+                  <a:lnTo>
+                    <a:pt x="2291920" y="38526"/>
+                  </a:lnTo>
+                  <a:lnTo>
+                    <a:pt x="2220298" y="37348"/>
+                  </a:lnTo>
+                  <a:lnTo>
+                    <a:pt x="2148675" y="36168"/>
+                  </a:lnTo>
+                  <a:lnTo>
+                    <a:pt x="2077053" y="34987"/>
+                  </a:lnTo>
+                  <a:lnTo>
+                    <a:pt x="2005430" y="33804"/>
+                  </a:lnTo>
+                  <a:lnTo>
+                    <a:pt x="1933808" y="32619"/>
+                  </a:lnTo>
+                  <a:lnTo>
+                    <a:pt x="1862185" y="31433"/>
+                  </a:lnTo>
+                  <a:lnTo>
+                    <a:pt x="1790563" y="30245"/>
+                  </a:lnTo>
+                  <a:lnTo>
+                    <a:pt x="1718940" y="29055"/>
+                  </a:lnTo>
+                  <a:lnTo>
+                    <a:pt x="1647318" y="27864"/>
+                  </a:lnTo>
+                  <a:lnTo>
+                    <a:pt x="1575695" y="26671"/>
+                  </a:lnTo>
+                  <a:lnTo>
+                    <a:pt x="1504073" y="25476"/>
+                  </a:lnTo>
+                  <a:lnTo>
+                    <a:pt x="1432450" y="24280"/>
+                  </a:lnTo>
+                  <a:lnTo>
+                    <a:pt x="1360827" y="23082"/>
+                  </a:lnTo>
+                  <a:lnTo>
+                    <a:pt x="1289205" y="21883"/>
+                  </a:lnTo>
+                  <a:lnTo>
+                    <a:pt x="1217582" y="20681"/>
+                  </a:lnTo>
+                  <a:lnTo>
+                    <a:pt x="1145960" y="19478"/>
+                  </a:lnTo>
+                  <a:lnTo>
+                    <a:pt x="1074337" y="18273"/>
+                  </a:lnTo>
+                  <a:lnTo>
+                    <a:pt x="1002715" y="17067"/>
+                  </a:lnTo>
+                  <a:lnTo>
+                    <a:pt x="931092" y="15859"/>
+                  </a:lnTo>
+                  <a:lnTo>
+                    <a:pt x="859470" y="14649"/>
+                  </a:lnTo>
+                  <a:lnTo>
+                    <a:pt x="787847" y="13438"/>
+                  </a:lnTo>
+                  <a:lnTo>
+                    <a:pt x="716225" y="12225"/>
+                  </a:lnTo>
+                  <a:lnTo>
+                    <a:pt x="644602" y="11010"/>
+                  </a:lnTo>
+                  <a:lnTo>
+                    <a:pt x="572980" y="9793"/>
+                  </a:lnTo>
+                  <a:lnTo>
+                    <a:pt x="501357" y="8575"/>
+                  </a:lnTo>
+                  <a:lnTo>
+                    <a:pt x="429735" y="7355"/>
+                  </a:lnTo>
+                  <a:lnTo>
+                    <a:pt x="358112" y="6133"/>
+                  </a:lnTo>
+                  <a:lnTo>
+                    <a:pt x="286490" y="4910"/>
+                  </a:lnTo>
+                  <a:lnTo>
+                    <a:pt x="214867" y="3685"/>
+                  </a:lnTo>
+                  <a:lnTo>
+                    <a:pt x="143245" y="2458"/>
+                  </a:lnTo>
+                  <a:lnTo>
+                    <a:pt x="71622" y="1230"/>
                   </a:lnTo>
                   <a:lnTo>
                     <a:pt x="0" y="0"/>
@@ -4112,264 +4106,261 @@
           </p:nvSpPr>
           <p:spPr>
             <a:xfrm>
-              <a:off x="2380410" y="2073503"/>
-              <a:ext cx="5882269" cy="3445211"/>
+              <a:off x="2399365" y="2073503"/>
+              <a:ext cx="5863313" cy="3444140"/>
             </a:xfrm>
             <a:custGeom>
               <a:avLst/>
               <a:pathLst>
-                <a:path w="5882269" h="3445211">
+                <a:path w="5863313" h="3444140">
                   <a:moveTo>
                     <a:pt x="0" y="0"/>
                   </a:moveTo>
                   <a:lnTo>
-                    <a:pt x="9222" y="25105"/>
-                  </a:lnTo>
-                  <a:lnTo>
-                    <a:pt x="80844" y="209677"/>
-                  </a:lnTo>
-                  <a:lnTo>
-                    <a:pt x="152467" y="384399"/>
-                  </a:lnTo>
-                  <a:lnTo>
-                    <a:pt x="224089" y="549797"/>
-                  </a:lnTo>
-                  <a:lnTo>
-                    <a:pt x="295712" y="706369"/>
-                  </a:lnTo>
-                  <a:lnTo>
-                    <a:pt x="367334" y="854585"/>
-                  </a:lnTo>
-                  <a:lnTo>
-                    <a:pt x="438957" y="994891"/>
-                  </a:lnTo>
-                  <a:lnTo>
-                    <a:pt x="510579" y="1127710"/>
-                  </a:lnTo>
-                  <a:lnTo>
-                    <a:pt x="582202" y="1253441"/>
-                  </a:lnTo>
-                  <a:lnTo>
-                    <a:pt x="653824" y="1372462"/>
-                  </a:lnTo>
-                  <a:lnTo>
-                    <a:pt x="725447" y="1485132"/>
-                  </a:lnTo>
-                  <a:lnTo>
-                    <a:pt x="797069" y="1591789"/>
-                  </a:lnTo>
-                  <a:lnTo>
-                    <a:pt x="868692" y="1692754"/>
-                  </a:lnTo>
-                  <a:lnTo>
-                    <a:pt x="940315" y="1788331"/>
-                  </a:lnTo>
-                  <a:lnTo>
-                    <a:pt x="1011937" y="1878808"/>
-                  </a:lnTo>
-                  <a:lnTo>
-                    <a:pt x="1083560" y="1964456"/>
-                  </a:lnTo>
-                  <a:lnTo>
-                    <a:pt x="1155182" y="2045534"/>
-                  </a:lnTo>
-                  <a:lnTo>
-                    <a:pt x="1226805" y="2122284"/>
-                  </a:lnTo>
-                  <a:lnTo>
-                    <a:pt x="1298427" y="2194939"/>
-                  </a:lnTo>
-                  <a:lnTo>
-                    <a:pt x="1370050" y="2263717"/>
-                  </a:lnTo>
-                  <a:lnTo>
-                    <a:pt x="1441672" y="2328825"/>
-                  </a:lnTo>
-                  <a:lnTo>
-                    <a:pt x="1513295" y="2390458"/>
-                  </a:lnTo>
-                  <a:lnTo>
-                    <a:pt x="1584917" y="2448801"/>
-                  </a:lnTo>
-                  <a:lnTo>
-                    <a:pt x="1656540" y="2504032"/>
-                  </a:lnTo>
-                  <a:lnTo>
-                    <a:pt x="1728162" y="2556315"/>
-                  </a:lnTo>
-                  <a:lnTo>
-                    <a:pt x="1799785" y="2605807"/>
-                  </a:lnTo>
-                  <a:lnTo>
-                    <a:pt x="1871407" y="2652659"/>
-                  </a:lnTo>
-                  <a:lnTo>
-                    <a:pt x="1943030" y="2697010"/>
-                  </a:lnTo>
-                  <a:lnTo>
-                    <a:pt x="2014652" y="2738995"/>
-                  </a:lnTo>
-                  <a:lnTo>
-                    <a:pt x="2086275" y="2778739"/>
-                  </a:lnTo>
-                  <a:lnTo>
-                    <a:pt x="2157897" y="2816362"/>
-                  </a:lnTo>
-                  <a:lnTo>
-                    <a:pt x="2229520" y="2851977"/>
-                  </a:lnTo>
-                  <a:lnTo>
-                    <a:pt x="2301143" y="2885692"/>
-                  </a:lnTo>
-                  <a:lnTo>
-                    <a:pt x="2372765" y="2917607"/>
-                  </a:lnTo>
-                  <a:lnTo>
-                    <a:pt x="2444388" y="2947820"/>
-                  </a:lnTo>
-                  <a:lnTo>
-                    <a:pt x="2516010" y="2976420"/>
-                  </a:lnTo>
-                  <a:lnTo>
-                    <a:pt x="2587633" y="3003493"/>
-                  </a:lnTo>
-                  <a:lnTo>
-                    <a:pt x="2659255" y="3029122"/>
-                  </a:lnTo>
-                  <a:lnTo>
-                    <a:pt x="2730878" y="3053383"/>
-                  </a:lnTo>
-                  <a:lnTo>
-                    <a:pt x="2802500" y="3076350"/>
-                  </a:lnTo>
-                  <a:lnTo>
-                    <a:pt x="2874123" y="3098091"/>
-                  </a:lnTo>
-                  <a:lnTo>
-                    <a:pt x="2945745" y="3118672"/>
-                  </a:lnTo>
-                  <a:lnTo>
-                    <a:pt x="3017368" y="3138154"/>
-                  </a:lnTo>
-                  <a:lnTo>
-                    <a:pt x="3088990" y="3156597"/>
-                  </a:lnTo>
-                  <a:lnTo>
-                    <a:pt x="3160613" y="3174055"/>
-                  </a:lnTo>
-                  <a:lnTo>
-                    <a:pt x="3232235" y="3190582"/>
-                  </a:lnTo>
-                  <a:lnTo>
-                    <a:pt x="3303858" y="3206227"/>
-                  </a:lnTo>
-                  <a:lnTo>
-                    <a:pt x="3375480" y="3221037"/>
-                  </a:lnTo>
-                  <a:lnTo>
-                    <a:pt x="3447103" y="3235056"/>
-                  </a:lnTo>
-                  <a:lnTo>
-                    <a:pt x="3518725" y="3248328"/>
-                  </a:lnTo>
-                  <a:lnTo>
-                    <a:pt x="3590348" y="3260891"/>
-                  </a:lnTo>
-                  <a:lnTo>
-                    <a:pt x="3661971" y="3272784"/>
-                  </a:lnTo>
-                  <a:lnTo>
-                    <a:pt x="3733593" y="3284042"/>
-                  </a:lnTo>
-                  <a:lnTo>
-                    <a:pt x="3805216" y="3294699"/>
-                  </a:lnTo>
-                  <a:lnTo>
-                    <a:pt x="3876838" y="3304788"/>
-                  </a:lnTo>
-                  <a:lnTo>
-                    <a:pt x="3948461" y="3314338"/>
-                  </a:lnTo>
-                  <a:lnTo>
-                    <a:pt x="4020083" y="3323379"/>
-                  </a:lnTo>
-                  <a:lnTo>
-                    <a:pt x="4091706" y="3331937"/>
-                  </a:lnTo>
-                  <a:lnTo>
-                    <a:pt x="4163328" y="3340038"/>
-                  </a:lnTo>
-                  <a:lnTo>
-                    <a:pt x="4234951" y="3347707"/>
-                  </a:lnTo>
-                  <a:lnTo>
-                    <a:pt x="4306573" y="3354967"/>
-                  </a:lnTo>
-                  <a:lnTo>
-                    <a:pt x="4378196" y="3361839"/>
-                  </a:lnTo>
-                  <a:lnTo>
-                    <a:pt x="4449818" y="3368345"/>
-                  </a:lnTo>
-                  <a:lnTo>
-                    <a:pt x="4521441" y="3374503"/>
-                  </a:lnTo>
-                  <a:lnTo>
-                    <a:pt x="4593063" y="3380333"/>
-                  </a:lnTo>
-                  <a:lnTo>
-                    <a:pt x="4664686" y="3385852"/>
-                  </a:lnTo>
-                  <a:lnTo>
-                    <a:pt x="4736308" y="3391076"/>
-                  </a:lnTo>
-                  <a:lnTo>
-                    <a:pt x="4807931" y="3396021"/>
-                  </a:lnTo>
-                  <a:lnTo>
-                    <a:pt x="4879553" y="3400703"/>
-                  </a:lnTo>
-                  <a:lnTo>
-                    <a:pt x="4951176" y="3405135"/>
-                  </a:lnTo>
-                  <a:lnTo>
-                    <a:pt x="5022799" y="3409330"/>
-                  </a:lnTo>
-                  <a:lnTo>
-                    <a:pt x="5094421" y="3413301"/>
-                  </a:lnTo>
-                  <a:lnTo>
-                    <a:pt x="5166044" y="3417060"/>
-                  </a:lnTo>
-                  <a:lnTo>
-                    <a:pt x="5237666" y="3420619"/>
-                  </a:lnTo>
-                  <a:lnTo>
-                    <a:pt x="5309289" y="3423988"/>
-                  </a:lnTo>
-                  <a:lnTo>
-                    <a:pt x="5380911" y="3427177"/>
-                  </a:lnTo>
-                  <a:lnTo>
-                    <a:pt x="5452534" y="3430196"/>
-                  </a:lnTo>
-                  <a:lnTo>
-                    <a:pt x="5524156" y="3433054"/>
-                  </a:lnTo>
-                  <a:lnTo>
-                    <a:pt x="5595779" y="3435759"/>
-                  </a:lnTo>
-                  <a:lnTo>
-                    <a:pt x="5667401" y="3438320"/>
-                  </a:lnTo>
-                  <a:lnTo>
-                    <a:pt x="5739024" y="3440744"/>
-                  </a:lnTo>
-                  <a:lnTo>
-                    <a:pt x="5810646" y="3443039"/>
-                  </a:lnTo>
-                  <a:lnTo>
-                    <a:pt x="5882269" y="3445211"/>
+                    <a:pt x="61888" y="161364"/>
+                  </a:lnTo>
+                  <a:lnTo>
+                    <a:pt x="133511" y="338169"/>
+                  </a:lnTo>
+                  <a:lnTo>
+                    <a:pt x="205133" y="505565"/>
+                  </a:lnTo>
+                  <a:lnTo>
+                    <a:pt x="276756" y="664053"/>
+                  </a:lnTo>
+                  <a:lnTo>
+                    <a:pt x="348379" y="814106"/>
+                  </a:lnTo>
+                  <a:lnTo>
+                    <a:pt x="420001" y="956175"/>
+                  </a:lnTo>
+                  <a:lnTo>
+                    <a:pt x="491624" y="1090683"/>
+                  </a:lnTo>
+                  <a:lnTo>
+                    <a:pt x="563246" y="1218033"/>
+                  </a:lnTo>
+                  <a:lnTo>
+                    <a:pt x="634869" y="1338606"/>
+                  </a:lnTo>
+                  <a:lnTo>
+                    <a:pt x="706491" y="1452762"/>
+                  </a:lnTo>
+                  <a:lnTo>
+                    <a:pt x="778114" y="1560844"/>
+                  </a:lnTo>
+                  <a:lnTo>
+                    <a:pt x="849736" y="1663174"/>
+                  </a:lnTo>
+                  <a:lnTo>
+                    <a:pt x="921359" y="1760058"/>
+                  </a:lnTo>
+                  <a:lnTo>
+                    <a:pt x="992981" y="1851786"/>
+                  </a:lnTo>
+                  <a:lnTo>
+                    <a:pt x="1064604" y="1938633"/>
+                  </a:lnTo>
+                  <a:lnTo>
+                    <a:pt x="1136226" y="2020859"/>
+                  </a:lnTo>
+                  <a:lnTo>
+                    <a:pt x="1207849" y="2098708"/>
+                  </a:lnTo>
+                  <a:lnTo>
+                    <a:pt x="1279471" y="2172415"/>
+                  </a:lnTo>
+                  <a:lnTo>
+                    <a:pt x="1351094" y="2242199"/>
+                  </a:lnTo>
+                  <a:lnTo>
+                    <a:pt x="1422716" y="2308270"/>
+                  </a:lnTo>
+                  <a:lnTo>
+                    <a:pt x="1494339" y="2370824"/>
+                  </a:lnTo>
+                  <a:lnTo>
+                    <a:pt x="1565961" y="2430050"/>
+                  </a:lnTo>
+                  <a:lnTo>
+                    <a:pt x="1637584" y="2486124"/>
+                  </a:lnTo>
+                  <a:lnTo>
+                    <a:pt x="1709207" y="2539213"/>
+                  </a:lnTo>
+                  <a:lnTo>
+                    <a:pt x="1780829" y="2589478"/>
+                  </a:lnTo>
+                  <a:lnTo>
+                    <a:pt x="1852452" y="2637068"/>
+                  </a:lnTo>
+                  <a:lnTo>
+                    <a:pt x="1924074" y="2682125"/>
+                  </a:lnTo>
+                  <a:lnTo>
+                    <a:pt x="1995697" y="2724784"/>
+                  </a:lnTo>
+                  <a:lnTo>
+                    <a:pt x="2067319" y="2765173"/>
+                  </a:lnTo>
+                  <a:lnTo>
+                    <a:pt x="2138942" y="2803413"/>
+                  </a:lnTo>
+                  <a:lnTo>
+                    <a:pt x="2210564" y="2839618"/>
+                  </a:lnTo>
+                  <a:lnTo>
+                    <a:pt x="2282187" y="2873896"/>
+                  </a:lnTo>
+                  <a:lnTo>
+                    <a:pt x="2353809" y="2906350"/>
+                  </a:lnTo>
+                  <a:lnTo>
+                    <a:pt x="2425432" y="2937077"/>
+                  </a:lnTo>
+                  <a:lnTo>
+                    <a:pt x="2497054" y="2966169"/>
+                  </a:lnTo>
+                  <a:lnTo>
+                    <a:pt x="2568677" y="2993712"/>
+                  </a:lnTo>
+                  <a:lnTo>
+                    <a:pt x="2640299" y="3019790"/>
+                  </a:lnTo>
+                  <a:lnTo>
+                    <a:pt x="2711922" y="3044480"/>
+                  </a:lnTo>
+                  <a:lnTo>
+                    <a:pt x="2783544" y="3067856"/>
+                  </a:lnTo>
+                  <a:lnTo>
+                    <a:pt x="2855167" y="3089989"/>
+                  </a:lnTo>
+                  <a:lnTo>
+                    <a:pt x="2926789" y="3110943"/>
+                  </a:lnTo>
+                  <a:lnTo>
+                    <a:pt x="2998412" y="3130782"/>
+                  </a:lnTo>
+                  <a:lnTo>
+                    <a:pt x="3070035" y="3149566"/>
+                  </a:lnTo>
+                  <a:lnTo>
+                    <a:pt x="3141657" y="3167349"/>
+                  </a:lnTo>
+                  <a:lnTo>
+                    <a:pt x="3213280" y="3184187"/>
+                  </a:lnTo>
+                  <a:lnTo>
+                    <a:pt x="3284902" y="3200128"/>
+                  </a:lnTo>
+                  <a:lnTo>
+                    <a:pt x="3356525" y="3215222"/>
+                  </a:lnTo>
+                  <a:lnTo>
+                    <a:pt x="3428147" y="3229511"/>
+                  </a:lnTo>
+                  <a:lnTo>
+                    <a:pt x="3499770" y="3243041"/>
+                  </a:lnTo>
+                  <a:lnTo>
+                    <a:pt x="3571392" y="3255850"/>
+                  </a:lnTo>
+                  <a:lnTo>
+                    <a:pt x="3643015" y="3267978"/>
+                  </a:lnTo>
+                  <a:lnTo>
+                    <a:pt x="3714637" y="3279461"/>
+                  </a:lnTo>
+                  <a:lnTo>
+                    <a:pt x="3786260" y="3290332"/>
+                  </a:lnTo>
+                  <a:lnTo>
+                    <a:pt x="3857882" y="3300625"/>
+                  </a:lnTo>
+                  <a:lnTo>
+                    <a:pt x="3929505" y="3310370"/>
+                  </a:lnTo>
+                  <a:lnTo>
+                    <a:pt x="4001127" y="3319596"/>
+                  </a:lnTo>
+                  <a:lnTo>
+                    <a:pt x="4072750" y="3328332"/>
+                  </a:lnTo>
+                  <a:lnTo>
+                    <a:pt x="4144372" y="3336602"/>
+                  </a:lnTo>
+                  <a:lnTo>
+                    <a:pt x="4215995" y="3344433"/>
+                  </a:lnTo>
+                  <a:lnTo>
+                    <a:pt x="4287617" y="3351847"/>
+                  </a:lnTo>
+                  <a:lnTo>
+                    <a:pt x="4359240" y="3358866"/>
+                  </a:lnTo>
+                  <a:lnTo>
+                    <a:pt x="4430863" y="3365511"/>
+                  </a:lnTo>
+                  <a:lnTo>
+                    <a:pt x="4502485" y="3371803"/>
+                  </a:lnTo>
+                  <a:lnTo>
+                    <a:pt x="4574108" y="3377761"/>
+                  </a:lnTo>
+                  <a:lnTo>
+                    <a:pt x="4645730" y="3383401"/>
+                  </a:lnTo>
+                  <a:lnTo>
+                    <a:pt x="4717353" y="3388741"/>
+                  </a:lnTo>
+                  <a:lnTo>
+                    <a:pt x="4788975" y="3393797"/>
+                  </a:lnTo>
+                  <a:lnTo>
+                    <a:pt x="4860598" y="3398584"/>
+                  </a:lnTo>
+                  <a:lnTo>
+                    <a:pt x="4932220" y="3403116"/>
+                  </a:lnTo>
+                  <a:lnTo>
+                    <a:pt x="5003843" y="3407406"/>
+                  </a:lnTo>
+                  <a:lnTo>
+                    <a:pt x="5075465" y="3411469"/>
+                  </a:lnTo>
+                  <a:lnTo>
+                    <a:pt x="5147088" y="3415315"/>
+                  </a:lnTo>
+                  <a:lnTo>
+                    <a:pt x="5218710" y="3418957"/>
+                  </a:lnTo>
+                  <a:lnTo>
+                    <a:pt x="5290333" y="3422405"/>
+                  </a:lnTo>
+                  <a:lnTo>
+                    <a:pt x="5361955" y="3425669"/>
+                  </a:lnTo>
+                  <a:lnTo>
+                    <a:pt x="5433578" y="3428760"/>
+                  </a:lnTo>
+                  <a:lnTo>
+                    <a:pt x="5505200" y="3431686"/>
+                  </a:lnTo>
+                  <a:lnTo>
+                    <a:pt x="5576823" y="3434456"/>
+                  </a:lnTo>
+                  <a:lnTo>
+                    <a:pt x="5648445" y="3437080"/>
+                  </a:lnTo>
+                  <a:lnTo>
+                    <a:pt x="5720068" y="3439563"/>
+                  </a:lnTo>
+                  <a:lnTo>
+                    <a:pt x="5791691" y="3441914"/>
+                  </a:lnTo>
+                  <a:lnTo>
+                    <a:pt x="5863313" y="3444140"/>
                   </a:lnTo>
                 </a:path>
               </a:pathLst>
@@ -4441,7 +4432,7 @@
           </p:nvSpPr>
           <p:spPr>
             <a:xfrm>
-              <a:off x="4254372" y="2073503"/>
+              <a:off x="4278722" y="2073503"/>
               <a:ext cx="0" cy="3649639"/>
             </a:xfrm>
             <a:custGeom>
@@ -4714,7 +4705,7 @@
           </p:nvSpPr>
           <p:spPr>
             <a:xfrm>
-              <a:off x="2254916" y="5785772"/>
+              <a:off x="2255364" y="5785772"/>
               <a:ext cx="161574" cy="80101"/>
             </a:xfrm>
             <a:prstGeom prst="rect">
@@ -4760,7 +4751,7 @@
           </p:nvSpPr>
           <p:spPr>
             <a:xfrm>
-              <a:off x="4120281" y="5785772"/>
+              <a:off x="4120286" y="5785772"/>
               <a:ext cx="62179" cy="80101"/>
             </a:xfrm>
             <a:prstGeom prst="rect">
@@ -4806,7 +4797,7 @@
           </p:nvSpPr>
           <p:spPr>
             <a:xfrm>
-              <a:off x="5904858" y="5785772"/>
+              <a:off x="5904422" y="5785772"/>
               <a:ext cx="124358" cy="80101"/>
             </a:xfrm>
             <a:prstGeom prst="rect">
@@ -4852,7 +4843,7 @@
           </p:nvSpPr>
           <p:spPr>
             <a:xfrm>
-              <a:off x="7720525" y="5785772"/>
+              <a:off x="7719647" y="5785772"/>
               <a:ext cx="124358" cy="80101"/>
             </a:xfrm>
             <a:prstGeom prst="rect">
@@ -5023,7 +5014,7 @@
                   <a:latin typeface="Helvetica"/>
                   <a:cs typeface="Helvetica"/>
                 </a:rPr>
-                <a:t>subHR per 10 % decline: 2.00 (1.03-3.88), p_Bonf = 0.236 (n = 6)  |  per IQR decline (Δ = 26.4 %): 6.29 (1.09-36.14)  |  IQR: [-11.1, 15.3] %</a:t>
+                <a:t>subHR per 10 % decline: 2.00 (1.02-3.93), p_Bonf = 0.266 (n = 6)  |  per IQR decline (Δ = 26.4 %): 6.24 (1.05-37.10)  |  IQR: [-11.1, 15.4] %</a:t>
               </a:r>
             </a:p>
           </p:txBody>
